--- a/units/unit04_procif/procif_v4.pptx
+++ b/units/unit04_procif/procif_v4.pptx
@@ -41,6 +41,7 @@
     <p:sldId id="296" r:id="rId22"/>
     <p:sldId id="292" r:id="rId23"/>
     <p:sldId id="300" r:id="rId24"/>
+    <p:sldId id="335" r:id="rId65"/>
     <p:sldId id="301" r:id="rId25"/>
     <p:sldId id="302" r:id="rId26"/>
     <p:sldId id="303" r:id="rId27"/>
@@ -11707,7 +11708,7 @@
                             <a:srgbClr val="262626"/>
                           </a:solidFill>
                         </a:rPr>
-                        <a:t>Identify bus master and slave</a:t>
+                        <a:t>Identify bus manager and subordinate</a:t>
                       </a:r>
                       <a:endParaRPr lang="en-US" sz="1500" dirty="0"/>
                     </a:p>
@@ -12242,7 +12243,7 @@
           <a:p>
             <a:r>
               <a:rPr lang="en-US" dirty="0"/>
-              <a:t>Master-Slave and Transactions</a:t>
+              <a:t>Managers and Subordinates</a:t>
             </a:r>
           </a:p>
         </p:txBody>
@@ -12751,7 +12752,7 @@
             </a:pPr>
             <a:r>
               <a:rPr lang="en-US" dirty="0"/>
-              <a:t>In AXI4-Lite:</a:t>
+              <a:t>Called master and slave until AMBA renamed them in 2021, and the port names (S_AXI, s_axilite) still do.   In AXI4-Lite:</a:t>
             </a:r>
           </a:p>
           <a:p>
@@ -12781,7 +12782,7 @@
                   </a:schemeClr>
                 </a:solidFill>
               </a:rPr>
-              <a:t>Master</a:t>
+              <a:t>Manager</a:t>
             </a:r>
             <a:r>
               <a:rPr lang="en-US" dirty="0"/>
@@ -12798,7 +12799,7 @@
                   </a:schemeClr>
                 </a:solidFill>
               </a:rPr>
-              <a:t>Slave</a:t>
+              <a:t>Subordinate</a:t>
             </a:r>
             <a:r>
               <a:rPr lang="en-US" dirty="0"/>
@@ -12843,7 +12844,7 @@
                   </a:schemeClr>
                 </a:solidFill>
               </a:rPr>
-              <a:t>MASTER</a:t>
+              <a:t>MANAGER</a:t>
             </a:r>
             <a:endParaRPr lang="en-US" dirty="0">
               <a:solidFill>
@@ -12869,8 +12870,8 @@
         </p:nvSpPr>
         <p:spPr>
           <a:xfrm>
-            <a:off x="7452443" y="1347798"/>
-            <a:ext cx="1490321" cy="400110"/>
+            <a:off x="7018103" y="1347798"/>
+            <a:ext cx="2359001" cy="400110"/>
           </a:xfrm>
           <a:prstGeom prst="rect">
             <a:avLst/>
@@ -12892,7 +12893,7 @@
                   </a:schemeClr>
                 </a:solidFill>
               </a:rPr>
-              <a:t>SLAVE</a:t>
+              <a:t>SUBORDINATE</a:t>
             </a:r>
             <a:endParaRPr lang="en-US" dirty="0">
               <a:solidFill>
@@ -13003,7 +13004,7 @@
                       <a:schemeClr val="accent6"/>
                     </a:solidFill>
                   </a:rPr>
-                  <a:t>master</a:t>
+                  <a:t>manager</a:t>
                 </a:r>
                 <a:r>
                   <a:rPr lang="en-US" dirty="0"/>
@@ -13095,7 +13096,7 @@
                       <a:srgbClr val="7030A0"/>
                     </a:solidFill>
                   </a:rPr>
-                  <a:t>slave</a:t>
+                  <a:t>subordinate</a:t>
                 </a:r>
                 <a:r>
                   <a:rPr lang="en-US" dirty="0"/>
@@ -13113,7 +13114,7 @@
                 <a:pPr lvl="1"/>
                 <a:r>
                   <a:rPr lang="en-US" dirty="0"/>
-                  <a:t>Slave can set these independently and any time it is ready</a:t>
+                  <a:t>Subordinate can set these independently and any time it is ready</a:t>
                 </a:r>
               </a:p>
               <a:p>
@@ -13174,14 +13175,14 @@
                 <a:pPr lvl="1"/>
                 <a:r>
                   <a:rPr lang="en-US" dirty="0"/>
-                  <a:t>After both transfers, the slave sets BVALID=1 with the write response</a:t>
+                  <a:t>After both transfers, the subordinate sets BVALID=1 with the write response</a:t>
                 </a:r>
               </a:p>
               <a:p>
                 <a:pPr lvl="1"/>
                 <a:r>
                   <a:rPr lang="en-US" dirty="0"/>
-                  <a:t>The master sets BREADY=1 to accept it; the response transfers when BVALID=BREADY=1</a:t>
+                  <a:t>The manager sets BREADY=1 to accept it; the response transfers when BVALID=BREADY=1</a:t>
                 </a:r>
               </a:p>
               <a:p>
@@ -13915,7 +13916,7 @@
                   </a:schemeClr>
                 </a:solidFill>
               </a:rPr>
-              <a:t>MASTER</a:t>
+              <a:t>MANAGER</a:t>
             </a:r>
             <a:endParaRPr lang="en-US" dirty="0">
               <a:solidFill>
@@ -13941,8 +13942,8 @@
         </p:nvSpPr>
         <p:spPr>
           <a:xfrm>
-            <a:off x="10609902" y="1499958"/>
-            <a:ext cx="1490321" cy="400110"/>
+            <a:off x="10175562" y="1499958"/>
+            <a:ext cx="2359001" cy="400110"/>
           </a:xfrm>
           <a:prstGeom prst="rect">
             <a:avLst/>
@@ -13964,7 +13965,7 @@
                   </a:schemeClr>
                 </a:solidFill>
               </a:rPr>
-              <a:t>SLAVE</a:t>
+              <a:t>SUBORDINATE</a:t>
             </a:r>
             <a:endParaRPr lang="en-US" dirty="0">
               <a:solidFill>
@@ -14030,7 +14031,7 @@
         <p:spPr>
           <a:xfrm>
             <a:off x="142559" y="1626723"/>
-            <a:ext cx="8057903" cy="3224738"/>
+            <a:ext cx="8057903" cy="3188379"/>
           </a:xfrm>
           <a:prstGeom prst="rect">
             <a:avLst/>
@@ -14094,125 +14095,6 @@
           </a:p>
         </p:txBody>
       </p:sp>
-      <p:cxnSp>
-        <p:nvCxnSpPr>
-          <p:cNvPr id="10" name="Straight Connector 9">
-            <a:extLst>
-              <a:ext uri="{FF2B5EF4-FFF2-40B4-BE49-F238E27FC236}">
-                <a16:creationId xmlns:a16="http://schemas.microsoft.com/office/drawing/2014/main" id="{EF19C5B9-EA49-E72C-5486-8BB3EC84730B}"/>
-              </a:ext>
-            </a:extLst>
-          </p:cNvPr>
-          <p:cNvCxnSpPr>
-            <a:cxnSpLocks/>
-          </p:cNvCxnSpPr>
-          <p:nvPr/>
-        </p:nvCxnSpPr>
-        <p:spPr>
-          <a:xfrm>
-            <a:off x="1818670" y="2321842"/>
-            <a:ext cx="0" cy="3276602"/>
-          </a:xfrm>
-          <a:prstGeom prst="line">
-            <a:avLst/>
-          </a:prstGeom>
-          <a:ln w="25400"/>
-        </p:spPr>
-        <p:style>
-          <a:lnRef idx="1">
-            <a:schemeClr val="accent1"/>
-          </a:lnRef>
-          <a:fillRef idx="0">
-            <a:schemeClr val="accent1"/>
-          </a:fillRef>
-          <a:effectRef idx="0">
-            <a:schemeClr val="accent1"/>
-          </a:effectRef>
-          <a:fontRef idx="minor">
-            <a:schemeClr val="tx1"/>
-          </a:fontRef>
-        </p:style>
-      </p:cxnSp>
-      <p:cxnSp>
-        <p:nvCxnSpPr>
-          <p:cNvPr id="11" name="Straight Connector 10">
-            <a:extLst>
-              <a:ext uri="{FF2B5EF4-FFF2-40B4-BE49-F238E27FC236}">
-                <a16:creationId xmlns:a16="http://schemas.microsoft.com/office/drawing/2014/main" id="{D706A970-5A1A-9EB6-66EF-04774D5681AE}"/>
-              </a:ext>
-            </a:extLst>
-          </p:cNvPr>
-          <p:cNvCxnSpPr/>
-          <p:nvPr/>
-        </p:nvCxnSpPr>
-        <p:spPr>
-          <a:xfrm>
-            <a:off x="5928287" y="2733770"/>
-            <a:ext cx="0" cy="2795587"/>
-          </a:xfrm>
-          <a:prstGeom prst="line">
-            <a:avLst/>
-          </a:prstGeom>
-          <a:ln w="25400"/>
-        </p:spPr>
-        <p:style>
-          <a:lnRef idx="1">
-            <a:schemeClr val="accent1"/>
-          </a:lnRef>
-          <a:fillRef idx="0">
-            <a:schemeClr val="accent1"/>
-          </a:fillRef>
-          <a:effectRef idx="0">
-            <a:schemeClr val="accent1"/>
-          </a:effectRef>
-          <a:fontRef idx="minor">
-            <a:schemeClr val="tx1"/>
-          </a:fontRef>
-        </p:style>
-      </p:cxnSp>
-      <p:sp>
-        <p:nvSpPr>
-          <p:cNvPr id="15" name="TextBox 14">
-            <a:extLst>
-              <a:ext uri="{FF2B5EF4-FFF2-40B4-BE49-F238E27FC236}">
-                <a16:creationId xmlns:a16="http://schemas.microsoft.com/office/drawing/2014/main" id="{64D5BC62-C73C-14D6-6B9F-7F7AD0CBAD22}"/>
-              </a:ext>
-            </a:extLst>
-          </p:cNvPr>
-          <p:cNvSpPr txBox="1"/>
-          <p:nvPr/>
-        </p:nvSpPr>
-        <p:spPr>
-          <a:xfrm>
-            <a:off x="3025074" y="4938423"/>
-            <a:ext cx="1262077" cy="646331"/>
-          </a:xfrm>
-          <a:prstGeom prst="rect">
-            <a:avLst/>
-          </a:prstGeom>
-          <a:noFill/>
-        </p:spPr>
-        <p:txBody>
-          <a:bodyPr wrap="none" rtlCol="0">
-            <a:spAutoFit/>
-          </a:bodyPr>
-          <a:lstStyle/>
-          <a:p>
-            <a:pPr algn="ctr"/>
-            <a:r>
-              <a:rPr lang="en-US" dirty="0"/>
-              <a:t>Transaction</a:t>
-            </a:r>
-            <a:br>
-              <a:rPr lang="en-US" dirty="0"/>
-            </a:br>
-            <a:r>
-              <a:rPr lang="en-US" dirty="0"/>
-              <a:t>4 cycles</a:t>
-            </a:r>
-          </a:p>
-        </p:txBody>
-      </p:sp>
       <p:sp>
         <p:nvSpPr>
           <p:cNvPr id="16" name="Content Placeholder 2">
@@ -14252,7 +14134,7 @@
           <a:p>
             <a:r>
               <a:rPr lang="en-US" dirty="0"/>
-              <a:t>Slave is ready before master </a:t>
+              <a:t>Subordinate is ready before manager </a:t>
             </a:r>
           </a:p>
           <a:p>
@@ -14332,7 +14214,7 @@
         <p:spPr>
           <a:xfrm>
             <a:off x="197263" y="1859756"/>
-            <a:ext cx="7842381" cy="3138487"/>
+            <a:ext cx="7842381" cy="3124077"/>
           </a:xfrm>
           <a:prstGeom prst="rect">
             <a:avLst/>
@@ -14396,125 +14278,6 @@
           </a:p>
         </p:txBody>
       </p:sp>
-      <p:cxnSp>
-        <p:nvCxnSpPr>
-          <p:cNvPr id="10" name="Straight Connector 9">
-            <a:extLst>
-              <a:ext uri="{FF2B5EF4-FFF2-40B4-BE49-F238E27FC236}">
-                <a16:creationId xmlns:a16="http://schemas.microsoft.com/office/drawing/2014/main" id="{542305EF-3619-44A8-63CC-D35E7453D130}"/>
-              </a:ext>
-            </a:extLst>
-          </p:cNvPr>
-          <p:cNvCxnSpPr>
-            <a:cxnSpLocks/>
-          </p:cNvCxnSpPr>
-          <p:nvPr/>
-        </p:nvCxnSpPr>
-        <p:spPr>
-          <a:xfrm>
-            <a:off x="1832958" y="2381662"/>
-            <a:ext cx="0" cy="3276602"/>
-          </a:xfrm>
-          <a:prstGeom prst="line">
-            <a:avLst/>
-          </a:prstGeom>
-          <a:ln w="25400"/>
-        </p:spPr>
-        <p:style>
-          <a:lnRef idx="1">
-            <a:schemeClr val="accent1"/>
-          </a:lnRef>
-          <a:fillRef idx="0">
-            <a:schemeClr val="accent1"/>
-          </a:fillRef>
-          <a:effectRef idx="0">
-            <a:schemeClr val="accent1"/>
-          </a:effectRef>
-          <a:fontRef idx="minor">
-            <a:schemeClr val="tx1"/>
-          </a:fontRef>
-        </p:style>
-      </p:cxnSp>
-      <p:cxnSp>
-        <p:nvCxnSpPr>
-          <p:cNvPr id="11" name="Straight Connector 10">
-            <a:extLst>
-              <a:ext uri="{FF2B5EF4-FFF2-40B4-BE49-F238E27FC236}">
-                <a16:creationId xmlns:a16="http://schemas.microsoft.com/office/drawing/2014/main" id="{86A0E8C4-F7DE-76DD-E627-595B6FDCE964}"/>
-              </a:ext>
-            </a:extLst>
-          </p:cNvPr>
-          <p:cNvCxnSpPr/>
-          <p:nvPr/>
-        </p:nvCxnSpPr>
-        <p:spPr>
-          <a:xfrm>
-            <a:off x="5023413" y="2797378"/>
-            <a:ext cx="0" cy="2795587"/>
-          </a:xfrm>
-          <a:prstGeom prst="line">
-            <a:avLst/>
-          </a:prstGeom>
-          <a:ln w="25400"/>
-        </p:spPr>
-        <p:style>
-          <a:lnRef idx="1">
-            <a:schemeClr val="accent1"/>
-          </a:lnRef>
-          <a:fillRef idx="0">
-            <a:schemeClr val="accent1"/>
-          </a:fillRef>
-          <a:effectRef idx="0">
-            <a:schemeClr val="accent1"/>
-          </a:effectRef>
-          <a:fontRef idx="minor">
-            <a:schemeClr val="tx1"/>
-          </a:fontRef>
-        </p:style>
-      </p:cxnSp>
-      <p:sp>
-        <p:nvSpPr>
-          <p:cNvPr id="15" name="TextBox 14">
-            <a:extLst>
-              <a:ext uri="{FF2B5EF4-FFF2-40B4-BE49-F238E27FC236}">
-                <a16:creationId xmlns:a16="http://schemas.microsoft.com/office/drawing/2014/main" id="{0EBD7E54-EC2C-2AD4-3D3B-E4718376672E}"/>
-              </a:ext>
-            </a:extLst>
-          </p:cNvPr>
-          <p:cNvSpPr txBox="1"/>
-          <p:nvPr/>
-        </p:nvSpPr>
-        <p:spPr>
-          <a:xfrm>
-            <a:off x="3039362" y="4998243"/>
-            <a:ext cx="1262077" cy="646331"/>
-          </a:xfrm>
-          <a:prstGeom prst="rect">
-            <a:avLst/>
-          </a:prstGeom>
-          <a:noFill/>
-        </p:spPr>
-        <p:txBody>
-          <a:bodyPr wrap="none" rtlCol="0">
-            <a:spAutoFit/>
-          </a:bodyPr>
-          <a:lstStyle/>
-          <a:p>
-            <a:pPr algn="ctr"/>
-            <a:r>
-              <a:rPr lang="en-US" dirty="0"/>
-              <a:t>Transaction</a:t>
-            </a:r>
-            <a:br>
-              <a:rPr lang="en-US" dirty="0"/>
-            </a:br>
-            <a:r>
-              <a:rPr lang="en-US" dirty="0"/>
-              <a:t>4 cycles</a:t>
-            </a:r>
-          </a:p>
-        </p:txBody>
-      </p:sp>
       <p:sp>
         <p:nvSpPr>
           <p:cNvPr id="16" name="Content Placeholder 2">
@@ -14554,13 +14317,13 @@
           <a:p>
             <a:r>
               <a:rPr lang="en-US" dirty="0"/>
-              <a:t>Master sets valid </a:t>
+              <a:t>Manager sets valid </a:t>
             </a:r>
           </a:p>
           <a:p>
             <a:r>
               <a:rPr lang="en-US" dirty="0"/>
-              <a:t>Slave is not ready</a:t>
+              <a:t>Subordinate is not ready</a:t>
             </a:r>
           </a:p>
           <a:p>
@@ -14701,7 +14464,7 @@
                 <a:pPr lvl="1"/>
                 <a:r>
                   <a:rPr lang="en-US" dirty="0"/>
-                  <a:t>Master sets AWVALID=1, AWADDR=</a:t>
+                  <a:t>Manager sets AWVALID=1, AWADDR=</a:t>
                 </a:r>
                 <a14:m>
                   <m:oMath xmlns:m="http://schemas.openxmlformats.org/officeDocument/2006/math">
@@ -14736,14 +14499,14 @@
                 <a:pPr lvl="1"/>
                 <a:r>
                   <a:rPr lang="en-US" dirty="0"/>
-                  <a:t>Slave is ready: AWREADY=WREADY=1</a:t>
+                  <a:t>Subordinate is ready: AWREADY=WREADY=1</a:t>
                 </a:r>
               </a:p>
               <a:p>
                 <a:pPr lvl="1"/>
                 <a:r>
                   <a:rPr lang="en-US" dirty="0"/>
-                  <a:t>Both address and data are transferred to slave</a:t>
+                  <a:t>Both address and data are transferred to subordinate</a:t>
                 </a:r>
               </a:p>
               <a:p>
@@ -14756,14 +14519,14 @@
                 <a:pPr lvl="1"/>
                 <a:r>
                   <a:rPr lang="en-US" dirty="0"/>
-                  <a:t>Slave set BVALID=1 signaling transaction complete on slave side</a:t>
+                  <a:t>Subordinate set BVALID=1 signaling transaction complete on subordinate side</a:t>
                 </a:r>
               </a:p>
               <a:p>
                 <a:pPr lvl="1"/>
                 <a:r>
                   <a:rPr lang="en-US" dirty="0"/>
-                  <a:t>Slave registers </a:t>
+                  <a:t>Subordinate registers </a:t>
                 </a:r>
               </a:p>
               <a:p>
@@ -14776,14 +14539,14 @@
                 <a:pPr lvl="1"/>
                 <a:r>
                   <a:rPr lang="en-US" dirty="0"/>
-                  <a:t>Master acknowledges with BREADY=1</a:t>
+                  <a:t>Manager acknowledges with BREADY=1</a:t>
                 </a:r>
               </a:p>
               <a:p>
                 <a:pPr lvl="1"/>
                 <a:r>
                   <a:rPr lang="en-US" dirty="0"/>
-                  <a:t>Master starts next transaction in same clock cycle</a:t>
+                  <a:t>Manager starts next transaction in same clock cycle</a:t>
                 </a:r>
               </a:p>
               <a:p>
@@ -14811,7 +14574,7 @@
                 </a:r>
                 <a:r>
                   <a:rPr lang="en-US" dirty="0"/>
-                  <a:t>= 2 clock cycles (master write + slave register)</a:t>
+                  <a:t>= 2 clock cycles (manager write + subordinate register)</a:t>
                 </a:r>
               </a:p>
               <a:p>
@@ -14978,14 +14741,14 @@
             <a:pPr lvl="1"/>
             <a:r>
               <a:rPr lang="en-US" dirty="0"/>
-              <a:t>Master sets data and address on cycle 0</a:t>
+              <a:t>Manager sets data and address on cycle 0</a:t>
             </a:r>
           </a:p>
           <a:p>
             <a:pPr lvl="1"/>
             <a:r>
               <a:rPr lang="en-US" dirty="0"/>
-              <a:t>Slave is ready</a:t>
+              <a:t>Subordinate is ready</a:t>
             </a:r>
           </a:p>
           <a:p>
@@ -14998,13 +14761,13 @@
             <a:pPr lvl="1"/>
             <a:r>
               <a:rPr lang="en-US" dirty="0"/>
-              <a:t>Slave takes 1-2 additional clock cycles for BREADY=1</a:t>
+              <a:t>Subordinate takes 1-2 additional clock cycles for BREADY=1</a:t>
             </a:r>
           </a:p>
           <a:p>
             <a:r>
               <a:rPr lang="en-US" dirty="0"/>
-              <a:t>Master takes at 1-2 additional clock cycles for BVALID=1 and next input</a:t>
+              <a:t>Manager takes at 1-2 additional clock cycles for BVALID=1 and next input</a:t>
             </a:r>
           </a:p>
         </p:txBody>
@@ -15209,7 +14972,7 @@
                       <a:schemeClr val="accent6"/>
                     </a:solidFill>
                   </a:rPr>
-                  <a:t>master</a:t>
+                  <a:t>manager</a:t>
                 </a:r>
                 <a:r>
                   <a:rPr lang="en-US" dirty="0"/>
@@ -15266,7 +15029,7 @@
                       <a:srgbClr val="7030A0"/>
                     </a:solidFill>
                   </a:rPr>
-                  <a:t>slave</a:t>
+                  <a:t>subordinate</a:t>
                 </a:r>
                 <a:r>
                   <a:rPr lang="en-US" dirty="0"/>
@@ -15283,7 +15046,7 @@
               <a:p>
                 <a:r>
                   <a:rPr lang="en-US" dirty="0"/>
-                  <a:t>When slave has fetched data:</a:t>
+                  <a:t>When subordinate has fetched data:</a:t>
                 </a:r>
               </a:p>
               <a:p>
@@ -15321,7 +15084,7 @@
                 <a:pPr lvl="1"/>
                 <a:r>
                   <a:rPr lang="en-US" dirty="0"/>
-                  <a:t>Master asserts RREADY=1 when ready to accept data</a:t>
+                  <a:t>Manager asserts RREADY=1 when ready to accept data</a:t>
                 </a:r>
               </a:p>
               <a:p>
@@ -15894,7 +15657,7 @@
                   </a:schemeClr>
                 </a:solidFill>
               </a:rPr>
-              <a:t>MASTER</a:t>
+              <a:t>MANAGER</a:t>
             </a:r>
             <a:endParaRPr lang="en-US" dirty="0">
               <a:solidFill>
@@ -15920,8 +15683,8 @@
         </p:nvSpPr>
         <p:spPr>
           <a:xfrm>
-            <a:off x="10609902" y="1499958"/>
-            <a:ext cx="1490321" cy="400110"/>
+            <a:off x="10175562" y="1499958"/>
+            <a:ext cx="2359001" cy="400110"/>
           </a:xfrm>
           <a:prstGeom prst="rect">
             <a:avLst/>
@@ -15943,7 +15706,7 @@
                   </a:schemeClr>
                 </a:solidFill>
               </a:rPr>
-              <a:t>SLAVE</a:t>
+              <a:t>SUBORDINATE</a:t>
             </a:r>
             <a:endParaRPr lang="en-US" dirty="0">
               <a:solidFill>
@@ -16134,7 +15897,7 @@
           <a:p>
             <a:r>
               <a:rPr lang="en-US" dirty="0"/>
-              <a:t>Slave is initially ready</a:t>
+              <a:t>Subordinate is initially ready</a:t>
             </a:r>
             <a:br>
               <a:rPr lang="en-US" dirty="0"/>
@@ -16147,7 +15910,7 @@
           <a:p>
             <a:r>
               <a:rPr lang="en-US" dirty="0"/>
-              <a:t>Slave immediately accepts </a:t>
+              <a:t>Subordinate immediately accepts </a:t>
             </a:r>
             <a:br>
               <a:rPr lang="en-US" dirty="0"/>
@@ -16160,7 +15923,7 @@
           <a:p>
             <a:r>
               <a:rPr lang="en-US" dirty="0"/>
-              <a:t>Master is immediately available for </a:t>
+              <a:t>Manager is immediately available for </a:t>
             </a:r>
           </a:p>
           <a:p>
@@ -16223,7 +15986,7 @@
         <p:spPr>
           <a:xfrm>
             <a:off x="646847" y="2245057"/>
-            <a:ext cx="7795784" cy="2901570"/>
+            <a:ext cx="7795784" cy="2514159"/>
           </a:xfrm>
           <a:prstGeom prst="rect">
             <a:avLst/>
@@ -16330,7 +16093,7 @@
                 <a:pPr lvl="1"/>
                 <a:r>
                   <a:rPr lang="en-US" dirty="0"/>
-                  <a:t>Master sets ARADDR=</a:t>
+                  <a:t>Manager sets ARADDR=</a:t>
                 </a:r>
                 <a14:m>
                   <m:oMath xmlns:m="http://schemas.openxmlformats.org/officeDocument/2006/math">
@@ -16351,14 +16114,14 @@
                 <a:pPr lvl="1"/>
                 <a:r>
                   <a:rPr lang="en-US" dirty="0"/>
-                  <a:t>Slave is ready: ARREADY=1</a:t>
+                  <a:t>Subordinate is ready: ARREADY=1</a:t>
                 </a:r>
               </a:p>
               <a:p>
                 <a:pPr lvl="1"/>
                 <a:r>
                   <a:rPr lang="en-US" dirty="0"/>
-                  <a:t>Address is transferred to slave</a:t>
+                  <a:t>Address is transferred to subordinate</a:t>
                 </a:r>
               </a:p>
               <a:p>
@@ -16371,7 +16134,7 @@
                 <a:pPr lvl="1"/>
                 <a:r>
                   <a:rPr lang="en-US" dirty="0"/>
-                  <a:t>Slave set RVALID=1 with data RDATA=</a:t>
+                  <a:t>Subordinate set RVALID=1 with data RDATA=</a:t>
                 </a:r>
                 <a14:m>
                   <m:oMath xmlns:m="http://schemas.openxmlformats.org/officeDocument/2006/math">
@@ -16389,7 +16152,7 @@
                 <a:pPr lvl="1"/>
                 <a:r>
                   <a:rPr lang="en-US" dirty="0"/>
-                  <a:t>Master is immediately ready, RREADY=1</a:t>
+                  <a:t>Manager is immediately ready, RREADY=1</a:t>
                 </a:r>
               </a:p>
               <a:p>
@@ -16402,7 +16165,7 @@
                 <a:pPr lvl="1"/>
                 <a:r>
                   <a:rPr lang="en-US" dirty="0"/>
-                  <a:t>Master moves to next read address</a:t>
+                  <a:t>Manager moves to next read address</a:t>
                 </a:r>
               </a:p>
               <a:p>
@@ -24486,7 +24249,7 @@
             </a:r>
             <a:r>
               <a:rPr lang="en-US" dirty="0"/>
-              <a:t> (AXI4-Lite slave)</a:t>
+              <a:t> (AXI4-Lite subordinate)</a:t>
             </a:r>
           </a:p>
           <a:p>
@@ -40433,6 +40196,379 @@
                 </a:solidFill>
               </a:rPr>
               <a:t>Also in the LLM grader: Unit 4 › Storage partitioning</a:t>
+            </a:r>
+            <a:endParaRPr lang="en-US" sz="1200" dirty="0"/>
+          </a:p>
+        </p:txBody>
+      </p:sp>
+      <p:sp>
+        <p:nvSpPr>
+          <p:cNvPr id="8" name="Slide Number Placeholder 8"/>
+          <p:cNvSpPr>
+            <a:spLocks noGrp="1"/>
+          </p:cNvSpPr>
+          <p:nvPr>
+            <p:ph type="sldNum" sz="quarter" idx="12"/>
+          </p:nvPr>
+        </p:nvSpPr>
+        <p:spPr/>
+        <p:txBody>
+          <a:bodyPr/>
+          <a:lstStyle/>
+          <a:p>
+            <a:fld id="{629637A9-119A-49DA-BD12-AAC58B377D80}" type="slidenum">
+              <a:rPr lang="en-US" smtClean="0"/>
+              <a:t>‹#›</a:t>
+            </a:fld>
+            <a:endParaRPr lang="en-US" dirty="0"/>
+          </a:p>
+        </p:txBody>
+      </p:sp>
+    </p:spTree>
+  </p:cSld>
+  <p:clrMapOvr>
+    <a:masterClrMapping/>
+  </p:clrMapOvr>
+</p:sld>
+</file>
+
+<file path=ppt/slides/slide59.xml><?xml version="1.0" encoding="utf-8"?>
+<p:sld xmlns:a="http://schemas.openxmlformats.org/drawingml/2006/main" xmlns:r="http://schemas.openxmlformats.org/officeDocument/2006/relationships" xmlns:p="http://schemas.openxmlformats.org/presentationml/2006/main">
+  <p:cSld>
+    <p:spTree>
+      <p:nvGrpSpPr>
+        <p:cNvPr id="1" name=""/>
+        <p:cNvGrpSpPr/>
+        <p:nvPr/>
+      </p:nvGrpSpPr>
+      <p:grpSpPr>
+        <a:xfrm>
+          <a:off x="0" y="0"/>
+          <a:ext cx="0" cy="0"/>
+          <a:chOff x="0" y="0"/>
+          <a:chExt cx="0" cy="0"/>
+        </a:xfrm>
+      </p:grpSpPr>
+      <p:sp>
+        <p:nvSpPr>
+          <p:cNvPr id="2" name="Title 2"/>
+          <p:cNvSpPr>
+            <a:spLocks noGrp="1"/>
+          </p:cNvSpPr>
+          <p:nvPr>
+            <p:ph type="title"/>
+          </p:nvPr>
+        </p:nvSpPr>
+        <p:spPr/>
+        <p:txBody>
+          <a:bodyPr/>
+          <a:lstStyle/>
+          <a:p>
+            <a:r>
+              <a:rPr lang="en-US" dirty="0"/>
+              <a:t>Read the Timing Diagram</a:t>
+            </a:r>
+          </a:p>
+        </p:txBody>
+      </p:sp>
+      <p:sp>
+        <p:nvSpPr>
+          <p:cNvPr id="3" name="Shape 3"/>
+          <p:cNvSpPr/>
+          <p:nvPr/>
+        </p:nvSpPr>
+        <p:spPr>
+          <a:xfrm>
+            <a:off x="9646920" y="621792"/>
+            <a:ext cx="1463040" cy="384048"/>
+          </a:xfrm>
+          <a:prstGeom prst="roundRect">
+            <a:avLst>
+              <a:gd name="adj" fmla="val 50000"/>
+            </a:avLst>
+          </a:prstGeom>
+          <a:solidFill>
+            <a:srgbClr val="57068C"/>
+          </a:solidFill>
+          <a:ln>
+            <a:noFill/>
+          </a:ln>
+        </p:spPr>
+        <p:txBody>
+          <a:bodyPr wrap="square" lIns="54864" tIns="27432" rIns="54864" bIns="27432" anchor="ctr" rtlCol="0">
+            <a:noAutofit/>
+          </a:bodyPr>
+          <a:lstStyle/>
+          <a:p>
+            <a:pPr algn="ctr"/>
+            <a:r>
+              <a:rPr lang="en-US" sz="1300" b="1" dirty="0">
+                <a:solidFill>
+                  <a:srgbClr val="FFFFFF"/>
+                </a:solidFill>
+              </a:rPr>
+              <a:t>IN CLASS</a:t>
+            </a:r>
+            <a:endParaRPr lang="en-US" sz="1300" dirty="0"/>
+          </a:p>
+        </p:txBody>
+      </p:sp>
+      <p:sp>
+        <p:nvSpPr>
+          <p:cNvPr id="4" name="TextBox 4"/>
+          <p:cNvSpPr txBox="1"/>
+          <p:nvPr/>
+        </p:nvSpPr>
+        <p:spPr>
+          <a:xfrm>
+            <a:off x="1097280" y="1645920"/>
+            <a:ext cx="10058400" cy="365760"/>
+          </a:xfrm>
+          <a:prstGeom prst="rect">
+            <a:avLst/>
+          </a:prstGeom>
+          <a:noFill/>
+        </p:spPr>
+        <p:txBody>
+          <a:bodyPr wrap="square" lIns="0" tIns="0" rIns="0" bIns="0" anchor="t" rtlCol="0">
+            <a:noAutofit/>
+          </a:bodyPr>
+          <a:lstStyle/>
+          <a:p>
+            <a:r>
+              <a:rPr lang="en-US" sz="1800" dirty="0">
+                <a:solidFill>
+                  <a:srgbClr val="262626"/>
+                </a:solidFill>
+              </a:rPr>
+              <a:t>Using the write-with-a-stall diagram on the previous slide:</a:t>
+            </a:r>
+            <a:endParaRPr lang="en-US" sz="1800" dirty="0"/>
+          </a:p>
+        </p:txBody>
+      </p:sp>
+      <p:sp>
+        <p:nvSpPr>
+          <p:cNvPr id="5" name="TextBox 5"/>
+          <p:cNvSpPr txBox="1"/>
+          <p:nvPr/>
+        </p:nvSpPr>
+        <p:spPr>
+          <a:xfrm>
+            <a:off x="1097280" y="2240280"/>
+            <a:ext cx="9692640" cy="3108960"/>
+          </a:xfrm>
+          <a:prstGeom prst="rect">
+            <a:avLst/>
+          </a:prstGeom>
+          <a:noFill/>
+        </p:spPr>
+        <p:txBody>
+          <a:bodyPr wrap="square" lIns="0" tIns="0" rIns="0" bIns="0" anchor="t" rtlCol="0">
+            <a:noAutofit/>
+          </a:bodyPr>
+          <a:lstStyle/>
+          <a:p>
+            <a:pPr marL="411480" indent="-411480">
+              <a:spcBef>
+                <a:spcPts val="900"/>
+              </a:spcBef>
+            </a:pPr>
+            <a:r>
+              <a:rPr lang="en-US" sz="1800" b="1" dirty="0">
+                <a:solidFill>
+                  <a:srgbClr val="57068C"/>
+                </a:solidFill>
+              </a:rPr>
+              <a:t>(a)</a:t>
+            </a:r>
+            <a:r>
+              <a:rPr lang="en-US" sz="1800" dirty="0">
+                <a:solidFill>
+                  <a:srgbClr val="262626"/>
+                </a:solidFill>
+              </a:rPr>
+              <a:t xml:space="preserve">	In which cycle does the address transfer on the AW channel? How do you know?</a:t>
+            </a:r>
+            <a:endParaRPr lang="en-US" sz="1800" dirty="0"/>
+          </a:p>
+          <a:p>
+            <a:pPr marL="411480" indent="-411480">
+              <a:spcBef>
+                <a:spcPts val="900"/>
+              </a:spcBef>
+            </a:pPr>
+            <a:r>
+              <a:rPr lang="en-US" sz="1800" b="1" dirty="0">
+                <a:solidFill>
+                  <a:srgbClr val="57068C"/>
+                </a:solidFill>
+              </a:rPr>
+              <a:t>(b)</a:t>
+            </a:r>
+            <a:r>
+              <a:rPr lang="en-US" sz="1800" dirty="0">
+                <a:solidFill>
+                  <a:srgbClr val="262626"/>
+                </a:solidFill>
+              </a:rPr>
+              <a:t xml:space="preserve">	In which cycle does the write data transfer on the W channel?</a:t>
+            </a:r>
+            <a:endParaRPr lang="en-US" sz="1800" dirty="0"/>
+          </a:p>
+          <a:p>
+            <a:pPr marL="411480" indent="-411480">
+              <a:spcBef>
+                <a:spcPts val="900"/>
+              </a:spcBef>
+            </a:pPr>
+            <a:r>
+              <a:rPr lang="en-US" sz="1800" b="1" dirty="0">
+                <a:solidFill>
+                  <a:srgbClr val="57068C"/>
+                </a:solidFill>
+              </a:rPr>
+              <a:t>(c)</a:t>
+            </a:r>
+            <a:r>
+              <a:rPr lang="en-US" sz="1800" dirty="0">
+                <a:solidFill>
+                  <a:srgbClr val="262626"/>
+                </a:solidFill>
+              </a:rPr>
+              <a:t xml:space="preserve">	In which cycle does the write response transfer on the B channel?</a:t>
+            </a:r>
+            <a:endParaRPr lang="en-US" sz="1800" dirty="0"/>
+          </a:p>
+          <a:p>
+            <a:pPr marL="411480" indent="-411480">
+              <a:spcBef>
+                <a:spcPts val="900"/>
+              </a:spcBef>
+            </a:pPr>
+            <a:r>
+              <a:rPr lang="en-US" sz="1800" b="1" dirty="0">
+                <a:solidFill>
+                  <a:srgbClr val="57068C"/>
+                </a:solidFill>
+              </a:rPr>
+              <a:t>(d)</a:t>
+            </a:r>
+            <a:r>
+              <a:rPr lang="en-US" sz="1800" dirty="0">
+                <a:solidFill>
+                  <a:srgbClr val="262626"/>
+                </a:solidFill>
+              </a:rPr>
+              <a:t xml:space="preserve">	The hatched region marks a wait. Which side is waiting, what is it waiting for, and for how many cycles?</a:t>
+            </a:r>
+            <a:endParaRPr lang="en-US" sz="1800" dirty="0"/>
+          </a:p>
+        </p:txBody>
+      </p:sp>
+      <p:sp>
+        <p:nvSpPr>
+          <p:cNvPr id="6" name="Shape 6"/>
+          <p:cNvSpPr/>
+          <p:nvPr/>
+        </p:nvSpPr>
+        <p:spPr>
+          <a:xfrm>
+            <a:off x="1097280" y="5029200"/>
+            <a:ext cx="9692640" cy="640080"/>
+          </a:xfrm>
+          <a:prstGeom prst="roundRect">
+            <a:avLst>
+              <a:gd name="adj" fmla="val 22000"/>
+            </a:avLst>
+          </a:prstGeom>
+          <a:solidFill>
+            <a:srgbClr val="EEE6F3"/>
+          </a:solidFill>
+          <a:ln>
+            <a:noFill/>
+          </a:ln>
+        </p:spPr>
+        <p:txBody>
+          <a:bodyPr wrap="square" lIns="54864" tIns="27432" rIns="54864" bIns="27432" anchor="ctr" rtlCol="0">
+            <a:noAutofit/>
+          </a:bodyPr>
+          <a:lstStyle/>
+          <a:p>
+            <a:pPr algn="ctr"/>
+            <a:r>
+              <a:rPr lang="en-US" sz="1600" dirty="0">
+                <a:solidFill>
+                  <a:srgbClr val="262626"/>
+                </a:solidFill>
+              </a:rPr>
+              <a:t xml:space="preserve">A transfer happens on the first cycle where </a:t>
+            </a:r>
+            <a:r>
+              <a:rPr lang="en-US" sz="1600" b="1" dirty="0">
+                <a:solidFill>
+                  <a:srgbClr val="57068C"/>
+                </a:solidFill>
+              </a:rPr>
+              <a:t>VALID</a:t>
+            </a:r>
+            <a:r>
+              <a:rPr lang="en-US" sz="1600" dirty="0">
+                <a:solidFill>
+                  <a:srgbClr val="262626"/>
+                </a:solidFill>
+              </a:rPr>
+              <a:t xml:space="preserve"> and </a:t>
+            </a:r>
+            <a:r>
+              <a:rPr lang="en-US" sz="1600" b="1" dirty="0">
+                <a:solidFill>
+                  <a:srgbClr val="57068C"/>
+                </a:solidFill>
+              </a:rPr>
+              <a:t>READY</a:t>
+            </a:r>
+            <a:r>
+              <a:rPr lang="en-US" sz="1600" dirty="0">
+                <a:solidFill>
+                  <a:srgbClr val="262626"/>
+                </a:solidFill>
+              </a:rPr>
+              <a:t xml:space="preserve"> are both high.</a:t>
+            </a:r>
+            <a:endParaRPr lang="en-US" sz="1600" dirty="0"/>
+          </a:p>
+        </p:txBody>
+      </p:sp>
+      <p:sp>
+        <p:nvSpPr>
+          <p:cNvPr id="7" name="TextBox 7"/>
+          <p:cNvSpPr txBox="1"/>
+          <p:nvPr/>
+        </p:nvSpPr>
+        <p:spPr>
+          <a:xfrm>
+            <a:off x="1097280" y="5669280"/>
+            <a:ext cx="8229600" cy="292608"/>
+          </a:xfrm>
+          <a:prstGeom prst="rect">
+            <a:avLst/>
+          </a:prstGeom>
+          <a:noFill/>
+        </p:spPr>
+        <p:txBody>
+          <a:bodyPr wrap="square" lIns="0" tIns="0" rIns="0" bIns="0" anchor="t" rtlCol="0">
+            <a:noAutofit/>
+          </a:bodyPr>
+          <a:lstStyle/>
+          <a:p>
+            <a:r>
+              <a:rPr lang="en-US" sz="1200" dirty="0">
+                <a:solidFill>
+                  <a:srgbClr val="6E6E6E"/>
+                </a:solidFill>
+              </a:rPr>
+              <a:t>Also in the LLM grader: Unit 4 › Reading a write timing diagram</a:t>
             </a:r>
             <a:endParaRPr lang="en-US" sz="1200" dirty="0"/>
           </a:p>
